--- a/Fase 1/Evidencias Grupales/MATU_Presentacion_Fase1.pptx
+++ b/Fase 1/Evidencias Grupales/MATU_Presentacion_Fase1.pptx
@@ -5722,7 +5722,7 @@
                 <a:ea typeface="Calibri" pitchFamily="34" charset="-122"/>
                 <a:cs typeface="Calibri" pitchFamily="34" charset="-120"/>
               </a:rPr>
-              <a:t>«Eso no estaba en la hoja porque yo lo sé, y se me olvidó que los demás no.»   —  N.71, cuidadora, entrevista 6</a:t>
+              <a:t>«Eso no estaba en la hoja porque yo lo sé, y se me olvidó que los demás no.»   —  E06, cuidadora, entrevista 6</a:t>
             </a:r>
             <a:endParaRPr lang="en-US" sz="1250" dirty="0"/>
           </a:p>

--- a/Fase 1/Evidencias Grupales/MATU_Presentacion_Fase1.pptx
+++ b/Fase 1/Evidencias Grupales/MATU_Presentacion_Fase1.pptx
@@ -5722,7 +5722,7 @@
                 <a:ea typeface="Calibri" pitchFamily="34" charset="-122"/>
                 <a:cs typeface="Calibri" pitchFamily="34" charset="-120"/>
               </a:rPr>
-              <a:t>«Eso no estaba en la hoja porque yo lo sé, y se me olvidó que los demás no.»   —  E06, cuidadora, entrevista 6</a:t>
+              <a:t>«Eso no estaba en la hoja porque yo lo sé, y se me olvidó que los demás no.»   —  N.71, cuidadora, entrevista 6</a:t>
             </a:r>
             <a:endParaRPr lang="en-US" sz="1250" dirty="0"/>
           </a:p>
